--- a/docs/ВКР_Ичев_Presentation.pptx
+++ b/docs/ВКР_Ичев_Presentation.pptx
@@ -4458,7 +4458,7 @@
                             <a:srgbClr val="444444"/>
                           </a:solidFill>
                         </a:rPr>
-                        <a:t>6.97 с ¹</a:t>
+                        <a:t>6.0 с ¹</a:t>
                       </a:r>
                     </a:p>
                   </a:txBody>
@@ -5113,7 +5113,7 @@
                   <a:srgbClr val="17873E"/>
                 </a:solidFill>
               </a:rPr>
-              <a:t>6.97 с</a:t>
+              <a:t>6.0 с</a:t>
             </a:r>
           </a:p>
         </p:txBody>
@@ -5409,7 +5409,7 @@
                   <a:srgbClr val="17873E"/>
                 </a:solidFill>
               </a:rPr>
-              <a:t>0.003%</a:t>
+              <a:t>0.005%</a:t>
             </a:r>
           </a:p>
         </p:txBody>
@@ -5557,7 +5557,7 @@
                   <a:srgbClr val="17873E"/>
                 </a:solidFill>
               </a:rPr>
-              <a:t>0.13 с</a:t>
+              <a:t>0.62 с</a:t>
             </a:r>
           </a:p>
         </p:txBody>
@@ -6094,7 +6094,7 @@
                   <a:srgbClr val="444444"/>
                 </a:solidFill>
               </a:rPr>
-              <a:t>6.  Нагрузочные тесты: p99 = 6.97 с при 200 ev/s (SLA ≤ 30 с); эффективная ёмкость стенда ≈480 ev/s; RTO = 2м37с, RPO = 0</a:t>
+              <a:t>6.  Нагрузочные тесты: p99 = 6.0 с при 200 ev/s (SLA ≤ 30 с); эффективная ёмкость стенда ≈480 ev/s; RTO = 2м37с, RPO = 0</a:t>
             </a:r>
           </a:p>
         </p:txBody>
@@ -8288,7 +8288,7 @@
                   <a:srgbClr val="444444"/>
                 </a:solidFill>
               </a:rPr>
-              <a:t>payment_history (append-only, аудит) + payment_current (ReplacingMergeTree, быстрые запросы).</a:t>
+              <a:t>payment_history (ReplacingMergeTree(processed_at), аудит) + payment_current (ReplacingMergeTree, быстрые запросы).</a:t>
             </a:r>
           </a:p>
         </p:txBody>
@@ -11507,7 +11507,7 @@
                   <a:srgbClr val="CCDDEE"/>
                 </a:solidFill>
               </a:rPr>
-              <a:t>payment_history (MergeTree) + payment_current (ReplacingMergeTree)</a:t>
+              <a:t>payment_history (ReplacingMergeTree(processed_at)) + payment_current (ReplacingMergeTree)</a:t>
             </a:r>
           </a:p>
         </p:txBody>
